--- a/PharmaFlow_pitchdeck.pptx
+++ b/PharmaFlow_pitchdeck.pptx
@@ -7961,6 +7961,17 @@
           <a:p>
             <a:pPr algn="ctr"/>
             <a:r>
+              <a:rPr lang="en-US" sz="1000">
+                <a:solidFill>
+                  <a:srgbClr val="D4E8D0"/>
+                </a:solidFill>
+                <a:latin typeface="Calibri" pitchFamily="34" charset="0"/>
+                <a:ea typeface="Calibri" pitchFamily="34" charset="-122"/>
+                <a:cs typeface="Calibri" pitchFamily="34" charset="-120"/>
+              </a:rPr>
+              <a:t>$240,000</a:t>
+            </a:r>
+            <a:r>
               <a:rPr lang="en-US" sz="1000" dirty="0">
                 <a:solidFill>
                   <a:srgbClr val="D4E8D0"/>
@@ -7969,7 +7980,7 @@
                 <a:ea typeface="Calibri" pitchFamily="34" charset="-122"/>
                 <a:cs typeface="Calibri" pitchFamily="34" charset="-120"/>
               </a:rPr>
-              <a:t>$240,000+</a:t>
+              <a:t>+</a:t>
             </a:r>
             <a:endParaRPr lang="en-US" sz="1000" dirty="0"/>
           </a:p>
@@ -8211,7 +8222,7 @@
                 <a:ea typeface="Calibri" pitchFamily="34" charset="-122"/>
                 <a:cs typeface="Calibri" pitchFamily="34" charset="-120"/>
               </a:rPr>
-              <a:t>$650/mo</a:t>
+              <a:t>$2,500/mo</a:t>
             </a:r>
             <a:endParaRPr lang="en-US" sz="1000" dirty="0"/>
           </a:p>
@@ -8453,7 +8464,7 @@
                 <a:ea typeface="Calibri" pitchFamily="34" charset="-122"/>
                 <a:cs typeface="Calibri" pitchFamily="34" charset="-120"/>
               </a:rPr>
-              <a:t>+$232,200</a:t>
+              <a:t>+$210,000</a:t>
             </a:r>
             <a:endParaRPr lang="en-US" sz="1000" dirty="0"/>
           </a:p>
@@ -8540,7 +8551,7 @@
                 <a:latin typeface="Calibri" pitchFamily="34" charset="0"/>
                 <a:cs typeface="Calibri" pitchFamily="34" charset="-120"/>
               </a:rPr>
-              <a:t>Very high ROI — $232K annual savings vs. $7,800/yr tool cost. Even 5–10 switches/month justify the Gold plan.</a:t>
+              <a:t>Very high ROI — $200K annual savings vs. $30,000/yr tool cost. Even 5–10 switches/month justify the Gold plan.</a:t>
             </a:r>
           </a:p>
         </p:txBody>
